--- a/docs/Sokoban_AI_Solver.pptx
+++ b/docs/Sokoban_AI_Solver.pptx
@@ -4,6 +4,9 @@
   <p:sldMasterIdLst>
     <p:sldMasterId id="2147483648" r:id="rId1"/>
   </p:sldMasterIdLst>
+  <p:notesMasterIdLst>
+    <p:notesMasterId r:id="rId16"/>
+  </p:notesMasterIdLst>
   <p:sldIdLst>
     <p:sldId id="256" r:id="rId2"/>
     <p:sldId id="257" r:id="rId3"/>
@@ -20,9 +23,6 @@
     <p:sldId id="268" r:id="rId14"/>
     <p:sldId id="269" r:id="rId15"/>
   </p:sldIdLst>
-  <p:notesMasterIdLst>
-    <p:notesMasterId r:id="rId16"/>
-  </p:notesMasterIdLst>
   <p:sldSz cx="12192000" cy="6858000"/>
   <p:notesSz cx="6858000" cy="12192000"/>
   <p:defaultTextStyle>
@@ -117,6 +117,11 @@
       </a:defRPr>
     </a:lvl9pPr>
   </p:defaultTextStyle>
+  <p:extLst>
+    <p:ext uri="{EFAFB233-063F-42B5-8137-9DF3F51BA10A}">
+      <p15:sldGuideLst xmlns:p15="http://schemas.microsoft.com/office/powerpoint/2012/main"/>
+    </p:ext>
+  </p:extLst>
 </p:presentation>
 </file>
 
@@ -142,234 +147,10 @@
           <a:chExt cx="0" cy="0"/>
         </a:xfrm>
       </p:grpSpPr>
-      <p:sp>
-        <p:nvSpPr>
-          <p:cNvPr id="2" name="Header Placeholder 1"/>
-          <p:cNvSpPr>
-            <a:spLocks noGrp="1"/>
-          </p:cNvSpPr>
-          <p:nvPr>
-            <p:ph type="hdr" sz="quarter"/>
-          </p:nvPr>
-        </p:nvSpPr>
-        <p:spPr>
-          <a:xfrm>
-            <a:off x="0" y="0"/>
-            <a:ext cx="2971800" cy="458788"/>
-          </a:xfrm>
-          <a:prstGeom prst="rect">
-            <a:avLst/>
-          </a:prstGeom>
-        </p:spPr>
-        <p:txBody>
-          <a:bodyPr vert="horz" lIns="91440" tIns="45720" rIns="91440" bIns="45720" rtlCol="0"/>
-          <a:lstStyle>
-            <a:lvl1pPr algn="l">
-              <a:defRPr sz="1200"/>
-            </a:lvl1pPr>
-          </a:lstStyle>
-          <a:p>
-            <a:endParaRPr lang="en-US"/>
-          </a:p>
-        </p:txBody>
-      </p:sp>
-      <p:sp>
-        <p:nvSpPr>
-          <p:cNvPr id="3" name="Date Placeholder 2"/>
-          <p:cNvSpPr>
-            <a:spLocks noGrp="1"/>
-          </p:cNvSpPr>
-          <p:nvPr>
-            <p:ph type="dt" idx="1"/>
-          </p:nvPr>
-        </p:nvSpPr>
-        <p:spPr>
-          <a:xfrm>
-            <a:off x="3884613" y="0"/>
-            <a:ext cx="2971800" cy="458788"/>
-          </a:xfrm>
-          <a:prstGeom prst="rect">
-            <a:avLst/>
-          </a:prstGeom>
-        </p:spPr>
-        <p:txBody>
-          <a:bodyPr vert="horz" lIns="91440" tIns="45720" rIns="91440" bIns="45720" rtlCol="0"/>
-          <a:lstStyle>
-            <a:lvl1pPr algn="r">
-              <a:defRPr sz="1200"/>
-            </a:lvl1pPr>
-          </a:lstStyle>
-          <a:p>
-            <a:fld id="{5282F153-3F37-0F45-9E97-73ACFA13230C}" type="datetimeFigureOut">
-              <a:rPr lang="en-US"/>
-              <a:t>7/23/19</a:t>
-            </a:fld>
-            <a:endParaRPr lang="en-US"/>
-          </a:p>
-        </p:txBody>
-      </p:sp>
-      <p:sp>
-        <p:nvSpPr>
-          <p:cNvPr id="4" name="Slide Image Placeholder 3"/>
-          <p:cNvSpPr>
-            <a:spLocks noGrp="1" noRot="1" noChangeAspect="1"/>
-          </p:cNvSpPr>
-          <p:nvPr>
-            <p:ph type="sldImg" idx="2"/>
-          </p:nvPr>
-        </p:nvSpPr>
-        <p:spPr>
-          <a:xfrm>
-            <a:off x="685800" y="1143000"/>
-            <a:ext cx="5486400" cy="3086100"/>
-          </a:xfrm>
-          <a:prstGeom prst="rect">
-            <a:avLst/>
-          </a:prstGeom>
-          <a:noFill/>
-          <a:ln w="12700">
-            <a:solidFill>
-              <a:prstClr val="black"/>
-            </a:solidFill>
-          </a:ln>
-        </p:spPr>
-        <p:txBody>
-          <a:bodyPr vert="horz" lIns="91440" tIns="45720" rIns="91440" bIns="45720" rtlCol="0" anchor="ctr"/>
-          <a:lstStyle/>
-          <a:p>
-            <a:endParaRPr lang="en-US"/>
-          </a:p>
-        </p:txBody>
-      </p:sp>
-      <p:sp>
-        <p:nvSpPr>
-          <p:cNvPr id="5" name="Notes Placeholder 4"/>
-          <p:cNvSpPr>
-            <a:spLocks noGrp="1"/>
-          </p:cNvSpPr>
-          <p:nvPr>
-            <p:ph type="body" sz="quarter" idx="3"/>
-          </p:nvPr>
-        </p:nvSpPr>
-        <p:spPr>
-          <a:xfrm>
-            <a:off x="685800" y="4400550"/>
-            <a:ext cx="5486400" cy="3600450"/>
-          </a:xfrm>
-          <a:prstGeom prst="rect">
-            <a:avLst/>
-          </a:prstGeom>
-        </p:spPr>
-        <p:txBody>
-          <a:bodyPr vert="horz" lIns="91440" tIns="45720" rIns="91440" bIns="45720" rtlCol="0"/>
-          <a:lstStyle/>
-          <a:p>
-            <a:pPr lvl="0"/>
-            <a:r>
-              <a:rPr lang="en-US"/>
-              <a:t>Click to edit Master text styles</a:t>
-            </a:r>
-          </a:p>
-          <a:p>
-            <a:pPr lvl="1"/>
-            <a:r>
-              <a:rPr lang="en-US"/>
-              <a:t>Second level</a:t>
-            </a:r>
-          </a:p>
-          <a:p>
-            <a:pPr lvl="2"/>
-            <a:r>
-              <a:rPr lang="en-US"/>
-              <a:t>Third level</a:t>
-            </a:r>
-          </a:p>
-          <a:p>
-            <a:pPr lvl="3"/>
-            <a:r>
-              <a:rPr lang="en-US"/>
-              <a:t>Fourth level</a:t>
-            </a:r>
-          </a:p>
-          <a:p>
-            <a:pPr lvl="4"/>
-            <a:r>
-              <a:rPr lang="en-US"/>
-              <a:t>Fifth level</a:t>
-            </a:r>
-          </a:p>
-        </p:txBody>
-      </p:sp>
-      <p:sp>
-        <p:nvSpPr>
-          <p:cNvPr id="6" name="Footer Placeholder 5"/>
-          <p:cNvSpPr>
-            <a:spLocks noGrp="1"/>
-          </p:cNvSpPr>
-          <p:nvPr>
-            <p:ph type="ftr" sz="quarter" idx="4"/>
-          </p:nvPr>
-        </p:nvSpPr>
-        <p:spPr>
-          <a:xfrm>
-            <a:off x="0" y="8685213"/>
-            <a:ext cx="2971800" cy="458787"/>
-          </a:xfrm>
-          <a:prstGeom prst="rect">
-            <a:avLst/>
-          </a:prstGeom>
-        </p:spPr>
-        <p:txBody>
-          <a:bodyPr vert="horz" lIns="91440" tIns="45720" rIns="91440" bIns="45720" rtlCol="0" anchor="b"/>
-          <a:lstStyle>
-            <a:lvl1pPr algn="l">
-              <a:defRPr sz="1200"/>
-            </a:lvl1pPr>
-          </a:lstStyle>
-          <a:p>
-            <a:endParaRPr lang="en-US"/>
-          </a:p>
-        </p:txBody>
-      </p:sp>
-      <p:sp>
-        <p:nvSpPr>
-          <p:cNvPr id="7" name="Slide Number Placeholder 6"/>
-          <p:cNvSpPr>
-            <a:spLocks noGrp="1"/>
-          </p:cNvSpPr>
-          <p:nvPr>
-            <p:ph type="sldNum" sz="quarter" idx="5"/>
-          </p:nvPr>
-        </p:nvSpPr>
-        <p:spPr>
-          <a:xfrm>
-            <a:off x="3884613" y="8685213"/>
-            <a:ext cx="2971800" cy="458787"/>
-          </a:xfrm>
-          <a:prstGeom prst="rect">
-            <a:avLst/>
-          </a:prstGeom>
-        </p:spPr>
-        <p:txBody>
-          <a:bodyPr vert="horz" lIns="91440" tIns="45720" rIns="91440" bIns="45720" rtlCol="0" anchor="b"/>
-          <a:lstStyle>
-            <a:lvl1pPr algn="r">
-              <a:defRPr sz="1200"/>
-            </a:lvl1pPr>
-          </a:lstStyle>
-          <a:p>
-            <a:fld id="{CE5E9CC1-C706-0F49-92D6-E571CC5EEA8F}" type="slidenum">
-              <a:rPr lang="en-US"/>
-              <a:t>‹#›</a:t>
-            </a:fld>
-            <a:endParaRPr lang="en-US"/>
-          </a:p>
-        </p:txBody>
-      </p:sp>
     </p:spTree>
     <p:extLst>
       <p:ext uri="{BB962C8B-B14F-4D97-AF65-F5344CB8AC3E}">
-        <p14:creationId xmlns:p14="http://schemas.microsoft.com/office/powerpoint/2010/main" val="1024086991"/>
+        <p14:creationId xmlns:p14="http://schemas.microsoft.com/office/powerpoint/2010/main" val="2716526787"/>
       </p:ext>
     </p:extLst>
   </p:cSld>
@@ -513,10 +294,6 @@
           <a:bodyPr/>
           <a:lstStyle/>
           <a:p>
-            <a:r>
-              <a:rPr lang="en-US" dirty="0"/>
-              <a:t/>
-            </a:r>
             <a:endParaRPr lang="en-US" dirty="0"/>
           </a:p>
         </p:txBody>
@@ -601,10 +378,6 @@
           <a:bodyPr/>
           <a:lstStyle/>
           <a:p>
-            <a:r>
-              <a:rPr lang="en-US" dirty="0"/>
-              <a:t/>
-            </a:r>
             <a:endParaRPr lang="en-US" dirty="0"/>
           </a:p>
         </p:txBody>
@@ -689,10 +462,6 @@
           <a:bodyPr/>
           <a:lstStyle/>
           <a:p>
-            <a:r>
-              <a:rPr lang="en-US" dirty="0"/>
-              <a:t/>
-            </a:r>
             <a:endParaRPr lang="en-US" dirty="0"/>
           </a:p>
         </p:txBody>
@@ -777,10 +546,6 @@
           <a:bodyPr/>
           <a:lstStyle/>
           <a:p>
-            <a:r>
-              <a:rPr lang="en-US" dirty="0"/>
-              <a:t/>
-            </a:r>
             <a:endParaRPr lang="en-US" dirty="0"/>
           </a:p>
         </p:txBody>
@@ -865,10 +630,6 @@
           <a:bodyPr/>
           <a:lstStyle/>
           <a:p>
-            <a:r>
-              <a:rPr lang="en-US" dirty="0"/>
-              <a:t/>
-            </a:r>
             <a:endParaRPr lang="en-US" dirty="0"/>
           </a:p>
         </p:txBody>
@@ -953,10 +714,6 @@
           <a:bodyPr/>
           <a:lstStyle/>
           <a:p>
-            <a:r>
-              <a:rPr lang="en-US" dirty="0"/>
-              <a:t/>
-            </a:r>
             <a:endParaRPr lang="en-US" dirty="0"/>
           </a:p>
         </p:txBody>
@@ -1041,10 +798,6 @@
           <a:bodyPr/>
           <a:lstStyle/>
           <a:p>
-            <a:r>
-              <a:rPr lang="en-US" dirty="0"/>
-              <a:t/>
-            </a:r>
             <a:endParaRPr lang="en-US" dirty="0"/>
           </a:p>
         </p:txBody>
@@ -1129,10 +882,6 @@
           <a:bodyPr/>
           <a:lstStyle/>
           <a:p>
-            <a:r>
-              <a:rPr lang="en-US" dirty="0"/>
-              <a:t/>
-            </a:r>
             <a:endParaRPr lang="en-US" dirty="0"/>
           </a:p>
         </p:txBody>
@@ -1217,10 +966,6 @@
           <a:bodyPr/>
           <a:lstStyle/>
           <a:p>
-            <a:r>
-              <a:rPr lang="en-US" dirty="0"/>
-              <a:t/>
-            </a:r>
             <a:endParaRPr lang="en-US" dirty="0"/>
           </a:p>
         </p:txBody>
@@ -1305,10 +1050,6 @@
           <a:bodyPr/>
           <a:lstStyle/>
           <a:p>
-            <a:r>
-              <a:rPr lang="en-US" dirty="0"/>
-              <a:t/>
-            </a:r>
             <a:endParaRPr lang="en-US" dirty="0"/>
           </a:p>
         </p:txBody>
@@ -1393,10 +1134,6 @@
           <a:bodyPr/>
           <a:lstStyle/>
           <a:p>
-            <a:r>
-              <a:rPr lang="en-US" dirty="0"/>
-              <a:t/>
-            </a:r>
             <a:endParaRPr lang="en-US" dirty="0"/>
           </a:p>
         </p:txBody>
@@ -1481,10 +1218,6 @@
           <a:bodyPr/>
           <a:lstStyle/>
           <a:p>
-            <a:r>
-              <a:rPr lang="en-US" dirty="0"/>
-              <a:t/>
-            </a:r>
             <a:endParaRPr lang="en-US" dirty="0"/>
           </a:p>
         </p:txBody>
@@ -1569,10 +1302,6 @@
           <a:bodyPr/>
           <a:lstStyle/>
           <a:p>
-            <a:r>
-              <a:rPr lang="en-US" dirty="0"/>
-              <a:t/>
-            </a:r>
             <a:endParaRPr lang="en-US" dirty="0"/>
           </a:p>
         </p:txBody>
@@ -1657,10 +1386,6 @@
           <a:bodyPr/>
           <a:lstStyle/>
           <a:p>
-            <a:r>
-              <a:rPr lang="en-US" dirty="0"/>
-              <a:t/>
-            </a:r>
             <a:endParaRPr lang="en-US" dirty="0"/>
           </a:p>
         </p:txBody>
@@ -1734,6 +1459,11 @@
 <file path=ppt/slideMasters/slideMaster1.xml><?xml version="1.0" encoding="utf-8"?>
 <p:sldMaster xmlns:a="http://schemas.openxmlformats.org/drawingml/2006/main" xmlns:r="http://schemas.openxmlformats.org/officeDocument/2006/relationships" xmlns:p="http://schemas.openxmlformats.org/presentationml/2006/main">
   <p:cSld>
+    <p:bg>
+      <p:bgRef idx="1001">
+        <a:schemeClr val="bg1"/>
+      </p:bgRef>
+    </p:bg>
     <p:spTree>
       <p:nvGrpSpPr>
         <p:cNvPr id="1" name=""/>
@@ -2016,6 +1746,7 @@
         <a:solidFill>
           <a:srgbClr val="FFFFFF"/>
         </a:solidFill>
+        <a:effectLst/>
       </p:bgPr>
     </p:bg>
     <p:spTree>
@@ -2053,7 +1784,7 @@
           <a:bodyPr wrap="square" rtlCol="0" anchor="ctr"/>
           <a:lstStyle/>
           <a:p>
-            <a:pPr algn="l" indent="0" marL="0">
+            <a:pPr marL="0" indent="0" algn="l">
               <a:buNone/>
             </a:pPr>
             <a:r>
@@ -2092,7 +1823,7 @@
           <a:bodyPr wrap="square" rtlCol="0" anchor="ctr"/>
           <a:lstStyle/>
           <a:p>
-            <a:pPr algn="l" indent="0" marL="0">
+            <a:pPr marL="0" indent="0" algn="l">
               <a:buNone/>
             </a:pPr>
             <a:r>
@@ -2104,7 +1835,29 @@
                 <a:ea typeface="Calibri" pitchFamily="34" charset="-122"/>
                 <a:cs typeface="Calibri" pitchFamily="34" charset="-120"/>
               </a:rPr>
-              <a:t>AI Search Algorithms for Puzzle Solving  |  Harsh  |  July 2026</a:t>
+              <a:t>AI Search Algorithms for Puzzle </a:t>
+            </a:r>
+            <a:r>
+              <a:rPr lang="en-US" sz="2000">
+                <a:solidFill>
+                  <a:srgbClr val="333333"/>
+                </a:solidFill>
+                <a:latin typeface="Calibri" pitchFamily="34" charset="0"/>
+                <a:ea typeface="Calibri" pitchFamily="34" charset="-122"/>
+                <a:cs typeface="Calibri" pitchFamily="34" charset="-120"/>
+              </a:rPr>
+              <a:t>Solving    </a:t>
+            </a:r>
+            <a:r>
+              <a:rPr lang="en-US" sz="2000" dirty="0">
+                <a:solidFill>
+                  <a:srgbClr val="333333"/>
+                </a:solidFill>
+                <a:latin typeface="Calibri" pitchFamily="34" charset="0"/>
+                <a:ea typeface="Calibri" pitchFamily="34" charset="-122"/>
+                <a:cs typeface="Calibri" pitchFamily="34" charset="-120"/>
+              </a:rPr>
+              <a:t>|  July 2026</a:t>
             </a:r>
             <a:endParaRPr lang="en-US" sz="2000" dirty="0"/>
           </a:p>
@@ -2126,6 +1879,7 @@
         <a:solidFill>
           <a:srgbClr val="FFFFFF"/>
         </a:solidFill>
+        <a:effectLst/>
       </p:bgPr>
     </p:bg>
     <p:spTree>
@@ -2163,7 +1917,7 @@
           <a:bodyPr wrap="square" lIns="0" tIns="0" rIns="0" bIns="0" rtlCol="0" anchor="ctr"/>
           <a:lstStyle/>
           <a:p>
-            <a:pPr indent="0" marL="0">
+            <a:pPr marL="0" indent="0">
               <a:buNone/>
             </a:pPr>
             <a:r>
@@ -2345,6 +2099,7 @@
         <a:solidFill>
           <a:srgbClr val="FFFFFF"/>
         </a:solidFill>
+        <a:effectLst/>
       </p:bgPr>
     </p:bg>
     <p:spTree>
@@ -2382,7 +2137,7 @@
           <a:bodyPr wrap="square" lIns="0" tIns="0" rIns="0" bIns="0" rtlCol="0" anchor="ctr"/>
           <a:lstStyle/>
           <a:p>
-            <a:pPr indent="0" marL="0">
+            <a:pPr marL="0" indent="0">
               <a:buNone/>
             </a:pPr>
             <a:r>
@@ -2423,9 +2178,27 @@
             <a:tbl>
               <a:tblPr/>
               <a:tblGrid>
-                <a:gridCol w="1828800"/>
-                <a:gridCol w="4114800"/>
-                <a:gridCol w="4937760"/>
+                <a:gridCol w="1828800">
+                  <a:extLst>
+                    <a:ext uri="{9D8B030D-6E8A-4147-A177-3AD203B41FA5}">
+                      <a16:colId xmlns:a16="http://schemas.microsoft.com/office/drawing/2014/main" val="20000"/>
+                    </a:ext>
+                  </a:extLst>
+                </a:gridCol>
+                <a:gridCol w="4114800">
+                  <a:extLst>
+                    <a:ext uri="{9D8B030D-6E8A-4147-A177-3AD203B41FA5}">
+                      <a16:colId xmlns:a16="http://schemas.microsoft.com/office/drawing/2014/main" val="20001"/>
+                    </a:ext>
+                  </a:extLst>
+                </a:gridCol>
+                <a:gridCol w="4937760">
+                  <a:extLst>
+                    <a:ext uri="{9D8B030D-6E8A-4147-A177-3AD203B41FA5}">
+                      <a16:colId xmlns:a16="http://schemas.microsoft.com/office/drawing/2014/main" val="20002"/>
+                    </a:ext>
+                  </a:extLst>
+                </a:gridCol>
               </a:tblGrid>
               <a:tr h="502920">
                 <a:tc>
@@ -2433,7 +2206,7 @@
                     <a:bodyPr/>
                     <a:lstStyle/>
                     <a:p>
-                      <a:pPr indent="0" marL="0">
+                      <a:pPr marL="0" indent="0">
                         <a:buNone/>
                       </a:pPr>
                       <a:r>
@@ -2454,7 +2227,7 @@
                       </a:endParaRPr>
                     </a:p>
                   </a:txBody>
-                  <a:tcPr marL="91440" marR="91440" marT="45720" marB="45720" anchor="ctr">
+                  <a:tcPr anchor="ctr">
                     <a:lnL w="12700" cap="flat" cmpd="sng" algn="ctr">
                       <a:solidFill>
                         <a:srgbClr val="D9D9D9"/>
@@ -2501,7 +2274,7 @@
                     <a:bodyPr/>
                     <a:lstStyle/>
                     <a:p>
-                      <a:pPr indent="0" marL="0">
+                      <a:pPr marL="0" indent="0">
                         <a:buNone/>
                       </a:pPr>
                       <a:r>
@@ -2522,7 +2295,7 @@
                       </a:endParaRPr>
                     </a:p>
                   </a:txBody>
-                  <a:tcPr marL="91440" marR="91440" marT="45720" marB="45720" anchor="ctr">
+                  <a:tcPr anchor="ctr">
                     <a:lnL w="12700" cap="flat" cmpd="sng" algn="ctr">
                       <a:solidFill>
                         <a:srgbClr val="D9D9D9"/>
@@ -2569,7 +2342,7 @@
                     <a:bodyPr/>
                     <a:lstStyle/>
                     <a:p>
-                      <a:pPr indent="0" marL="0">
+                      <a:pPr marL="0" indent="0">
                         <a:buNone/>
                       </a:pPr>
                       <a:r>
@@ -2590,7 +2363,7 @@
                       </a:endParaRPr>
                     </a:p>
                   </a:txBody>
-                  <a:tcPr marL="91440" marR="91440" marT="45720" marB="45720" anchor="ctr">
+                  <a:tcPr anchor="ctr">
                     <a:lnL w="12700" cap="flat" cmpd="sng" algn="ctr">
                       <a:solidFill>
                         <a:srgbClr val="D9D9D9"/>
@@ -2632,6 +2405,11 @@
                     </a:solidFill>
                   </a:tcPr>
                 </a:tc>
+                <a:extLst>
+                  <a:ext uri="{0D108BD9-81ED-4DB2-BD59-A6C34878D82A}">
+                    <a16:rowId xmlns:a16="http://schemas.microsoft.com/office/drawing/2014/main" val="10000"/>
+                  </a:ext>
+                </a:extLst>
               </a:tr>
               <a:tr h="502920">
                 <a:tc>
@@ -2639,7 +2417,7 @@
                     <a:bodyPr/>
                     <a:lstStyle/>
                     <a:p>
-                      <a:pPr indent="0" marL="0">
+                      <a:pPr marL="0" indent="0">
                         <a:buNone/>
                       </a:pPr>
                       <a:r>
@@ -2660,7 +2438,7 @@
                       </a:endParaRPr>
                     </a:p>
                   </a:txBody>
-                  <a:tcPr marL="91440" marR="91440" marT="45720" marB="45720" anchor="ctr">
+                  <a:tcPr anchor="ctr">
                     <a:lnL w="12700" cap="flat" cmpd="sng" algn="ctr">
                       <a:solidFill>
                         <a:srgbClr val="D9D9D9"/>
@@ -2704,7 +2482,7 @@
                     <a:bodyPr/>
                     <a:lstStyle/>
                     <a:p>
-                      <a:pPr indent="0" marL="0">
+                      <a:pPr marL="0" indent="0">
                         <a:buNone/>
                       </a:pPr>
                       <a:r>
@@ -2725,7 +2503,7 @@
                       </a:endParaRPr>
                     </a:p>
                   </a:txBody>
-                  <a:tcPr marL="91440" marR="91440" marT="45720" marB="45720" anchor="ctr">
+                  <a:tcPr anchor="ctr">
                     <a:lnL w="12700" cap="flat" cmpd="sng" algn="ctr">
                       <a:solidFill>
                         <a:srgbClr val="D9D9D9"/>
@@ -2769,7 +2547,7 @@
                     <a:bodyPr/>
                     <a:lstStyle/>
                     <a:p>
-                      <a:pPr indent="0" marL="0">
+                      <a:pPr marL="0" indent="0">
                         <a:buNone/>
                       </a:pPr>
                       <a:r>
@@ -2790,7 +2568,7 @@
                       </a:endParaRPr>
                     </a:p>
                   </a:txBody>
-                  <a:tcPr marL="91440" marR="91440" marT="45720" marB="45720" anchor="ctr">
+                  <a:tcPr anchor="ctr">
                     <a:lnL w="12700" cap="flat" cmpd="sng" algn="ctr">
                       <a:solidFill>
                         <a:srgbClr val="D9D9D9"/>
@@ -2829,6 +2607,11 @@
                     </a:lnB>
                   </a:tcPr>
                 </a:tc>
+                <a:extLst>
+                  <a:ext uri="{0D108BD9-81ED-4DB2-BD59-A6C34878D82A}">
+                    <a16:rowId xmlns:a16="http://schemas.microsoft.com/office/drawing/2014/main" val="10001"/>
+                  </a:ext>
+                </a:extLst>
               </a:tr>
               <a:tr h="502920">
                 <a:tc>
@@ -2836,7 +2619,7 @@
                     <a:bodyPr/>
                     <a:lstStyle/>
                     <a:p>
-                      <a:pPr indent="0" marL="0">
+                      <a:pPr marL="0" indent="0">
                         <a:buNone/>
                       </a:pPr>
                       <a:r>
@@ -2857,7 +2640,7 @@
                       </a:endParaRPr>
                     </a:p>
                   </a:txBody>
-                  <a:tcPr marL="91440" marR="91440" marT="45720" marB="45720" anchor="ctr">
+                  <a:tcPr anchor="ctr">
                     <a:lnL w="12700" cap="flat" cmpd="sng" algn="ctr">
                       <a:solidFill>
                         <a:srgbClr val="D9D9D9"/>
@@ -2901,7 +2684,7 @@
                     <a:bodyPr/>
                     <a:lstStyle/>
                     <a:p>
-                      <a:pPr indent="0" marL="0">
+                      <a:pPr marL="0" indent="0">
                         <a:buNone/>
                       </a:pPr>
                       <a:r>
@@ -2922,7 +2705,7 @@
                       </a:endParaRPr>
                     </a:p>
                   </a:txBody>
-                  <a:tcPr marL="91440" marR="91440" marT="45720" marB="45720" anchor="ctr">
+                  <a:tcPr anchor="ctr">
                     <a:lnL w="12700" cap="flat" cmpd="sng" algn="ctr">
                       <a:solidFill>
                         <a:srgbClr val="D9D9D9"/>
@@ -2966,7 +2749,7 @@
                     <a:bodyPr/>
                     <a:lstStyle/>
                     <a:p>
-                      <a:pPr indent="0" marL="0">
+                      <a:pPr marL="0" indent="0">
                         <a:buNone/>
                       </a:pPr>
                       <a:r>
@@ -2987,7 +2770,7 @@
                       </a:endParaRPr>
                     </a:p>
                   </a:txBody>
-                  <a:tcPr marL="91440" marR="91440" marT="45720" marB="45720" anchor="ctr">
+                  <a:tcPr anchor="ctr">
                     <a:lnL w="12700" cap="flat" cmpd="sng" algn="ctr">
                       <a:solidFill>
                         <a:srgbClr val="D9D9D9"/>
@@ -3026,6 +2809,11 @@
                     </a:lnB>
                   </a:tcPr>
                 </a:tc>
+                <a:extLst>
+                  <a:ext uri="{0D108BD9-81ED-4DB2-BD59-A6C34878D82A}">
+                    <a16:rowId xmlns:a16="http://schemas.microsoft.com/office/drawing/2014/main" val="10002"/>
+                  </a:ext>
+                </a:extLst>
               </a:tr>
               <a:tr h="502920">
                 <a:tc>
@@ -3033,7 +2821,7 @@
                     <a:bodyPr/>
                     <a:lstStyle/>
                     <a:p>
-                      <a:pPr indent="0" marL="0">
+                      <a:pPr marL="0" indent="0">
                         <a:buNone/>
                       </a:pPr>
                       <a:r>
@@ -3054,7 +2842,7 @@
                       </a:endParaRPr>
                     </a:p>
                   </a:txBody>
-                  <a:tcPr marL="91440" marR="91440" marT="45720" marB="45720" anchor="ctr">
+                  <a:tcPr anchor="ctr">
                     <a:lnL w="12700" cap="flat" cmpd="sng" algn="ctr">
                       <a:solidFill>
                         <a:srgbClr val="D9D9D9"/>
@@ -3098,7 +2886,7 @@
                     <a:bodyPr/>
                     <a:lstStyle/>
                     <a:p>
-                      <a:pPr indent="0" marL="0">
+                      <a:pPr marL="0" indent="0">
                         <a:buNone/>
                       </a:pPr>
                       <a:r>
@@ -3119,7 +2907,7 @@
                       </a:endParaRPr>
                     </a:p>
                   </a:txBody>
-                  <a:tcPr marL="91440" marR="91440" marT="45720" marB="45720" anchor="ctr">
+                  <a:tcPr anchor="ctr">
                     <a:lnL w="12700" cap="flat" cmpd="sng" algn="ctr">
                       <a:solidFill>
                         <a:srgbClr val="D9D9D9"/>
@@ -3163,7 +2951,7 @@
                     <a:bodyPr/>
                     <a:lstStyle/>
                     <a:p>
-                      <a:pPr indent="0" marL="0">
+                      <a:pPr marL="0" indent="0">
                         <a:buNone/>
                       </a:pPr>
                       <a:r>
@@ -3184,7 +2972,7 @@
                       </a:endParaRPr>
                     </a:p>
                   </a:txBody>
-                  <a:tcPr marL="91440" marR="91440" marT="45720" marB="45720" anchor="ctr">
+                  <a:tcPr anchor="ctr">
                     <a:lnL w="12700" cap="flat" cmpd="sng" algn="ctr">
                       <a:solidFill>
                         <a:srgbClr val="D9D9D9"/>
@@ -3223,6 +3011,11 @@
                     </a:lnB>
                   </a:tcPr>
                 </a:tc>
+                <a:extLst>
+                  <a:ext uri="{0D108BD9-81ED-4DB2-BD59-A6C34878D82A}">
+                    <a16:rowId xmlns:a16="http://schemas.microsoft.com/office/drawing/2014/main" val="10003"/>
+                  </a:ext>
+                </a:extLst>
               </a:tr>
               <a:tr h="502920">
                 <a:tc>
@@ -3230,7 +3023,7 @@
                     <a:bodyPr/>
                     <a:lstStyle/>
                     <a:p>
-                      <a:pPr indent="0" marL="0">
+                      <a:pPr marL="0" indent="0">
                         <a:buNone/>
                       </a:pPr>
                       <a:r>
@@ -3251,7 +3044,7 @@
                       </a:endParaRPr>
                     </a:p>
                   </a:txBody>
-                  <a:tcPr marL="91440" marR="91440" marT="45720" marB="45720" anchor="ctr">
+                  <a:tcPr anchor="ctr">
                     <a:lnL w="12700" cap="flat" cmpd="sng" algn="ctr">
                       <a:solidFill>
                         <a:srgbClr val="D9D9D9"/>
@@ -3295,7 +3088,7 @@
                     <a:bodyPr/>
                     <a:lstStyle/>
                     <a:p>
-                      <a:pPr indent="0" marL="0">
+                      <a:pPr marL="0" indent="0">
                         <a:buNone/>
                       </a:pPr>
                       <a:r>
@@ -3316,7 +3109,7 @@
                       </a:endParaRPr>
                     </a:p>
                   </a:txBody>
-                  <a:tcPr marL="91440" marR="91440" marT="45720" marB="45720" anchor="ctr">
+                  <a:tcPr anchor="ctr">
                     <a:lnL w="12700" cap="flat" cmpd="sng" algn="ctr">
                       <a:solidFill>
                         <a:srgbClr val="D9D9D9"/>
@@ -3360,7 +3153,7 @@
                     <a:bodyPr/>
                     <a:lstStyle/>
                     <a:p>
-                      <a:pPr indent="0" marL="0">
+                      <a:pPr marL="0" indent="0">
                         <a:buNone/>
                       </a:pPr>
                       <a:r>
@@ -3381,7 +3174,7 @@
                       </a:endParaRPr>
                     </a:p>
                   </a:txBody>
-                  <a:tcPr marL="91440" marR="91440" marT="45720" marB="45720" anchor="ctr">
+                  <a:tcPr anchor="ctr">
                     <a:lnL w="12700" cap="flat" cmpd="sng" algn="ctr">
                       <a:solidFill>
                         <a:srgbClr val="D9D9D9"/>
@@ -3420,6 +3213,11 @@
                     </a:lnB>
                   </a:tcPr>
                 </a:tc>
+                <a:extLst>
+                  <a:ext uri="{0D108BD9-81ED-4DB2-BD59-A6C34878D82A}">
+                    <a16:rowId xmlns:a16="http://schemas.microsoft.com/office/drawing/2014/main" val="10004"/>
+                  </a:ext>
+                </a:extLst>
               </a:tr>
               <a:tr h="502920">
                 <a:tc>
@@ -3427,7 +3225,7 @@
                     <a:bodyPr/>
                     <a:lstStyle/>
                     <a:p>
-                      <a:pPr indent="0" marL="0">
+                      <a:pPr marL="0" indent="0">
                         <a:buNone/>
                       </a:pPr>
                       <a:r>
@@ -3448,7 +3246,7 @@
                       </a:endParaRPr>
                     </a:p>
                   </a:txBody>
-                  <a:tcPr marL="91440" marR="91440" marT="45720" marB="45720" anchor="ctr">
+                  <a:tcPr anchor="ctr">
                     <a:lnL w="12700" cap="flat" cmpd="sng" algn="ctr">
                       <a:solidFill>
                         <a:srgbClr val="D9D9D9"/>
@@ -3492,7 +3290,7 @@
                     <a:bodyPr/>
                     <a:lstStyle/>
                     <a:p>
-                      <a:pPr indent="0" marL="0">
+                      <a:pPr marL="0" indent="0">
                         <a:buNone/>
                       </a:pPr>
                       <a:r>
@@ -3513,7 +3311,7 @@
                       </a:endParaRPr>
                     </a:p>
                   </a:txBody>
-                  <a:tcPr marL="91440" marR="91440" marT="45720" marB="45720" anchor="ctr">
+                  <a:tcPr anchor="ctr">
                     <a:lnL w="12700" cap="flat" cmpd="sng" algn="ctr">
                       <a:solidFill>
                         <a:srgbClr val="D9D9D9"/>
@@ -3557,7 +3355,7 @@
                     <a:bodyPr/>
                     <a:lstStyle/>
                     <a:p>
-                      <a:pPr indent="0" marL="0">
+                      <a:pPr marL="0" indent="0">
                         <a:buNone/>
                       </a:pPr>
                       <a:r>
@@ -3578,7 +3376,7 @@
                       </a:endParaRPr>
                     </a:p>
                   </a:txBody>
-                  <a:tcPr marL="91440" marR="91440" marT="45720" marB="45720" anchor="ctr">
+                  <a:tcPr anchor="ctr">
                     <a:lnL w="12700" cap="flat" cmpd="sng" algn="ctr">
                       <a:solidFill>
                         <a:srgbClr val="D9D9D9"/>
@@ -3617,6 +3415,11 @@
                     </a:lnB>
                   </a:tcPr>
                 </a:tc>
+                <a:extLst>
+                  <a:ext uri="{0D108BD9-81ED-4DB2-BD59-A6C34878D82A}">
+                    <a16:rowId xmlns:a16="http://schemas.microsoft.com/office/drawing/2014/main" val="10005"/>
+                  </a:ext>
+                </a:extLst>
               </a:tr>
             </a:tbl>
           </a:graphicData>
@@ -3638,6 +3441,7 @@
         <a:solidFill>
           <a:srgbClr val="FFFFFF"/>
         </a:solidFill>
+        <a:effectLst/>
       </p:bgPr>
     </p:bg>
     <p:spTree>
@@ -3675,7 +3479,7 @@
           <a:bodyPr wrap="square" lIns="0" tIns="0" rIns="0" bIns="0" rtlCol="0" anchor="ctr"/>
           <a:lstStyle/>
           <a:p>
-            <a:pPr indent="0" marL="0">
+            <a:pPr marL="0" indent="0">
               <a:buNone/>
             </a:pPr>
             <a:r>
@@ -3815,6 +3619,7 @@
         <a:solidFill>
           <a:srgbClr val="FFFFFF"/>
         </a:solidFill>
+        <a:effectLst/>
       </p:bgPr>
     </p:bg>
     <p:spTree>
@@ -3852,7 +3657,7 @@
           <a:bodyPr wrap="square" lIns="0" tIns="0" rIns="0" bIns="0" rtlCol="0" anchor="ctr"/>
           <a:lstStyle/>
           <a:p>
-            <a:pPr indent="0" marL="0">
+            <a:pPr marL="0" indent="0">
               <a:buNone/>
             </a:pPr>
             <a:r>
@@ -3992,6 +3797,7 @@
         <a:solidFill>
           <a:srgbClr val="FFFFFF"/>
         </a:solidFill>
+        <a:effectLst/>
       </p:bgPr>
     </p:bg>
     <p:spTree>
@@ -4029,7 +3835,7 @@
           <a:bodyPr wrap="square" lIns="0" tIns="0" rIns="0" bIns="0" rtlCol="0" anchor="ctr"/>
           <a:lstStyle/>
           <a:p>
-            <a:pPr indent="0" marL="0">
+            <a:pPr marL="0" indent="0">
               <a:buNone/>
             </a:pPr>
             <a:r>
@@ -4169,6 +3975,7 @@
         <a:solidFill>
           <a:srgbClr val="FFFFFF"/>
         </a:solidFill>
+        <a:effectLst/>
       </p:bgPr>
     </p:bg>
     <p:spTree>
@@ -4206,7 +4013,7 @@
           <a:bodyPr wrap="square" lIns="0" tIns="0" rIns="0" bIns="0" rtlCol="0" anchor="ctr"/>
           <a:lstStyle/>
           <a:p>
-            <a:pPr indent="0" marL="0">
+            <a:pPr marL="0" indent="0">
               <a:buNone/>
             </a:pPr>
             <a:r>
@@ -4451,6 +4258,7 @@
         <a:solidFill>
           <a:srgbClr val="FFFFFF"/>
         </a:solidFill>
+        <a:effectLst/>
       </p:bgPr>
     </p:bg>
     <p:spTree>
@@ -4488,7 +4296,7 @@
           <a:bodyPr wrap="square" lIns="0" tIns="0" rIns="0" bIns="0" rtlCol="0" anchor="ctr"/>
           <a:lstStyle/>
           <a:p>
-            <a:pPr indent="0" marL="0">
+            <a:pPr marL="0" indent="0">
               <a:buNone/>
             </a:pPr>
             <a:r>
@@ -4649,6 +4457,7 @@
         <a:solidFill>
           <a:srgbClr val="FFFFFF"/>
         </a:solidFill>
+        <a:effectLst/>
       </p:bgPr>
     </p:bg>
     <p:spTree>
@@ -4686,7 +4495,7 @@
           <a:bodyPr wrap="square" lIns="0" tIns="0" rIns="0" bIns="0" rtlCol="0" anchor="ctr"/>
           <a:lstStyle/>
           <a:p>
-            <a:pPr indent="0" marL="0">
+            <a:pPr marL="0" indent="0">
               <a:buNone/>
             </a:pPr>
             <a:r>
@@ -4826,6 +4635,7 @@
         <a:solidFill>
           <a:srgbClr val="FFFFFF"/>
         </a:solidFill>
+        <a:effectLst/>
       </p:bgPr>
     </p:bg>
     <p:spTree>
@@ -4863,7 +4673,7 @@
           <a:bodyPr wrap="square" lIns="0" tIns="0" rIns="0" bIns="0" rtlCol="0" anchor="ctr"/>
           <a:lstStyle/>
           <a:p>
-            <a:pPr indent="0" marL="0">
+            <a:pPr marL="0" indent="0">
               <a:buNone/>
             </a:pPr>
             <a:r>
@@ -5024,6 +4834,7 @@
         <a:solidFill>
           <a:srgbClr val="FFFFFF"/>
         </a:solidFill>
+        <a:effectLst/>
       </p:bgPr>
     </p:bg>
     <p:spTree>
@@ -5061,7 +4872,7 @@
           <a:bodyPr wrap="square" lIns="0" tIns="0" rIns="0" bIns="0" rtlCol="0" anchor="ctr"/>
           <a:lstStyle/>
           <a:p>
-            <a:pPr indent="0" marL="0">
+            <a:pPr marL="0" indent="0">
               <a:buNone/>
             </a:pPr>
             <a:r>
@@ -5222,6 +5033,7 @@
         <a:solidFill>
           <a:srgbClr val="FFFFFF"/>
         </a:solidFill>
+        <a:effectLst/>
       </p:bgPr>
     </p:bg>
     <p:spTree>
@@ -5259,7 +5071,7 @@
           <a:bodyPr wrap="square" lIns="0" tIns="0" rIns="0" bIns="0" rtlCol="0" anchor="ctr"/>
           <a:lstStyle/>
           <a:p>
-            <a:pPr indent="0" marL="0">
+            <a:pPr marL="0" indent="0">
               <a:buNone/>
             </a:pPr>
             <a:r>
@@ -5420,6 +5232,7 @@
         <a:solidFill>
           <a:srgbClr val="FFFFFF"/>
         </a:solidFill>
+        <a:effectLst/>
       </p:bgPr>
     </p:bg>
     <p:spTree>
@@ -5457,7 +5270,7 @@
           <a:bodyPr wrap="square" lIns="0" tIns="0" rIns="0" bIns="0" rtlCol="0" anchor="ctr"/>
           <a:lstStyle/>
           <a:p>
-            <a:pPr indent="0" marL="0">
+            <a:pPr marL="0" indent="0">
               <a:buNone/>
             </a:pPr>
             <a:r>
@@ -5498,10 +5311,34 @@
             <a:tbl>
               <a:tblPr/>
               <a:tblGrid>
-                <a:gridCol w="3200400"/>
-                <a:gridCol w="2560320"/>
-                <a:gridCol w="2560320"/>
-                <a:gridCol w="2560320"/>
+                <a:gridCol w="3200400">
+                  <a:extLst>
+                    <a:ext uri="{9D8B030D-6E8A-4147-A177-3AD203B41FA5}">
+                      <a16:colId xmlns:a16="http://schemas.microsoft.com/office/drawing/2014/main" val="20000"/>
+                    </a:ext>
+                  </a:extLst>
+                </a:gridCol>
+                <a:gridCol w="2560320">
+                  <a:extLst>
+                    <a:ext uri="{9D8B030D-6E8A-4147-A177-3AD203B41FA5}">
+                      <a16:colId xmlns:a16="http://schemas.microsoft.com/office/drawing/2014/main" val="20001"/>
+                    </a:ext>
+                  </a:extLst>
+                </a:gridCol>
+                <a:gridCol w="2560320">
+                  <a:extLst>
+                    <a:ext uri="{9D8B030D-6E8A-4147-A177-3AD203B41FA5}">
+                      <a16:colId xmlns:a16="http://schemas.microsoft.com/office/drawing/2014/main" val="20002"/>
+                    </a:ext>
+                  </a:extLst>
+                </a:gridCol>
+                <a:gridCol w="2560320">
+                  <a:extLst>
+                    <a:ext uri="{9D8B030D-6E8A-4147-A177-3AD203B41FA5}">
+                      <a16:colId xmlns:a16="http://schemas.microsoft.com/office/drawing/2014/main" val="20003"/>
+                    </a:ext>
+                  </a:extLst>
+                </a:gridCol>
               </a:tblGrid>
               <a:tr h="502920">
                 <a:tc>
@@ -5509,7 +5346,7 @@
                     <a:bodyPr/>
                     <a:lstStyle/>
                     <a:p>
-                      <a:pPr indent="0" marL="0">
+                      <a:pPr marL="0" indent="0">
                         <a:buNone/>
                       </a:pPr>
                       <a:r>
@@ -5530,7 +5367,7 @@
                       </a:endParaRPr>
                     </a:p>
                   </a:txBody>
-                  <a:tcPr marL="91440" marR="91440" marT="45720" marB="45720" anchor="ctr">
+                  <a:tcPr anchor="ctr">
                     <a:lnL w="12700" cap="flat" cmpd="sng" algn="ctr">
                       <a:solidFill>
                         <a:srgbClr val="D9D9D9"/>
@@ -5577,7 +5414,7 @@
                     <a:bodyPr/>
                     <a:lstStyle/>
                     <a:p>
-                      <a:pPr indent="0" marL="0">
+                      <a:pPr marL="0" indent="0">
                         <a:buNone/>
                       </a:pPr>
                       <a:r>
@@ -5598,7 +5435,7 @@
                       </a:endParaRPr>
                     </a:p>
                   </a:txBody>
-                  <a:tcPr marL="91440" marR="91440" marT="45720" marB="45720" anchor="ctr">
+                  <a:tcPr anchor="ctr">
                     <a:lnL w="12700" cap="flat" cmpd="sng" algn="ctr">
                       <a:solidFill>
                         <a:srgbClr val="D9D9D9"/>
@@ -5645,7 +5482,7 @@
                     <a:bodyPr/>
                     <a:lstStyle/>
                     <a:p>
-                      <a:pPr indent="0" marL="0">
+                      <a:pPr marL="0" indent="0">
                         <a:buNone/>
                       </a:pPr>
                       <a:r>
@@ -5666,7 +5503,7 @@
                       </a:endParaRPr>
                     </a:p>
                   </a:txBody>
-                  <a:tcPr marL="91440" marR="91440" marT="45720" marB="45720" anchor="ctr">
+                  <a:tcPr anchor="ctr">
                     <a:lnL w="12700" cap="flat" cmpd="sng" algn="ctr">
                       <a:solidFill>
                         <a:srgbClr val="D9D9D9"/>
@@ -5713,7 +5550,7 @@
                     <a:bodyPr/>
                     <a:lstStyle/>
                     <a:p>
-                      <a:pPr indent="0" marL="0">
+                      <a:pPr marL="0" indent="0">
                         <a:buNone/>
                       </a:pPr>
                       <a:r>
@@ -5734,7 +5571,7 @@
                       </a:endParaRPr>
                     </a:p>
                   </a:txBody>
-                  <a:tcPr marL="91440" marR="91440" marT="45720" marB="45720" anchor="ctr">
+                  <a:tcPr anchor="ctr">
                     <a:lnL w="12700" cap="flat" cmpd="sng" algn="ctr">
                       <a:solidFill>
                         <a:srgbClr val="D9D9D9"/>
@@ -5776,6 +5613,11 @@
                     </a:solidFill>
                   </a:tcPr>
                 </a:tc>
+                <a:extLst>
+                  <a:ext uri="{0D108BD9-81ED-4DB2-BD59-A6C34878D82A}">
+                    <a16:rowId xmlns:a16="http://schemas.microsoft.com/office/drawing/2014/main" val="10000"/>
+                  </a:ext>
+                </a:extLst>
               </a:tr>
               <a:tr h="502920">
                 <a:tc>
@@ -5783,7 +5625,7 @@
                     <a:bodyPr/>
                     <a:lstStyle/>
                     <a:p>
-                      <a:pPr indent="0" marL="0">
+                      <a:pPr marL="0" indent="0">
                         <a:buNone/>
                       </a:pPr>
                       <a:r>
@@ -5804,7 +5646,7 @@
                       </a:endParaRPr>
                     </a:p>
                   </a:txBody>
-                  <a:tcPr marL="91440" marR="91440" marT="45720" marB="45720" anchor="ctr">
+                  <a:tcPr anchor="ctr">
                     <a:lnL w="12700" cap="flat" cmpd="sng" algn="ctr">
                       <a:solidFill>
                         <a:srgbClr val="D9D9D9"/>
@@ -5848,7 +5690,7 @@
                     <a:bodyPr/>
                     <a:lstStyle/>
                     <a:p>
-                      <a:pPr indent="0" marL="0">
+                      <a:pPr marL="0" indent="0">
                         <a:buNone/>
                       </a:pPr>
                       <a:r>
@@ -5869,7 +5711,7 @@
                       </a:endParaRPr>
                     </a:p>
                   </a:txBody>
-                  <a:tcPr marL="91440" marR="91440" marT="45720" marB="45720" anchor="ctr">
+                  <a:tcPr anchor="ctr">
                     <a:lnL w="12700" cap="flat" cmpd="sng" algn="ctr">
                       <a:solidFill>
                         <a:srgbClr val="D9D9D9"/>
@@ -5913,7 +5755,7 @@
                     <a:bodyPr/>
                     <a:lstStyle/>
                     <a:p>
-                      <a:pPr indent="0" marL="0">
+                      <a:pPr marL="0" indent="0">
                         <a:buNone/>
                       </a:pPr>
                       <a:r>
@@ -5934,7 +5776,7 @@
                       </a:endParaRPr>
                     </a:p>
                   </a:txBody>
-                  <a:tcPr marL="91440" marR="91440" marT="45720" marB="45720" anchor="ctr">
+                  <a:tcPr anchor="ctr">
                     <a:lnL w="12700" cap="flat" cmpd="sng" algn="ctr">
                       <a:solidFill>
                         <a:srgbClr val="D9D9D9"/>
@@ -5978,7 +5820,7 @@
                     <a:bodyPr/>
                     <a:lstStyle/>
                     <a:p>
-                      <a:pPr indent="0" marL="0">
+                      <a:pPr marL="0" indent="0">
                         <a:buNone/>
                       </a:pPr>
                       <a:r>
@@ -5999,7 +5841,7 @@
                       </a:endParaRPr>
                     </a:p>
                   </a:txBody>
-                  <a:tcPr marL="91440" marR="91440" marT="45720" marB="45720" anchor="ctr">
+                  <a:tcPr anchor="ctr">
                     <a:lnL w="12700" cap="flat" cmpd="sng" algn="ctr">
                       <a:solidFill>
                         <a:srgbClr val="D9D9D9"/>
@@ -6038,6 +5880,11 @@
                     </a:lnB>
                   </a:tcPr>
                 </a:tc>
+                <a:extLst>
+                  <a:ext uri="{0D108BD9-81ED-4DB2-BD59-A6C34878D82A}">
+                    <a16:rowId xmlns:a16="http://schemas.microsoft.com/office/drawing/2014/main" val="10001"/>
+                  </a:ext>
+                </a:extLst>
               </a:tr>
               <a:tr h="502920">
                 <a:tc>
@@ -6045,7 +5892,7 @@
                     <a:bodyPr/>
                     <a:lstStyle/>
                     <a:p>
-                      <a:pPr indent="0" marL="0">
+                      <a:pPr marL="0" indent="0">
                         <a:buNone/>
                       </a:pPr>
                       <a:r>
@@ -6066,7 +5913,7 @@
                       </a:endParaRPr>
                     </a:p>
                   </a:txBody>
-                  <a:tcPr marL="91440" marR="91440" marT="45720" marB="45720" anchor="ctr">
+                  <a:tcPr anchor="ctr">
                     <a:lnL w="12700" cap="flat" cmpd="sng" algn="ctr">
                       <a:solidFill>
                         <a:srgbClr val="D9D9D9"/>
@@ -6110,7 +5957,7 @@
                     <a:bodyPr/>
                     <a:lstStyle/>
                     <a:p>
-                      <a:pPr indent="0" marL="0">
+                      <a:pPr marL="0" indent="0">
                         <a:buNone/>
                       </a:pPr>
                       <a:r>
@@ -6131,7 +5978,7 @@
                       </a:endParaRPr>
                     </a:p>
                   </a:txBody>
-                  <a:tcPr marL="91440" marR="91440" marT="45720" marB="45720" anchor="ctr">
+                  <a:tcPr anchor="ctr">
                     <a:lnL w="12700" cap="flat" cmpd="sng" algn="ctr">
                       <a:solidFill>
                         <a:srgbClr val="D9D9D9"/>
@@ -6175,7 +6022,7 @@
                     <a:bodyPr/>
                     <a:lstStyle/>
                     <a:p>
-                      <a:pPr indent="0" marL="0">
+                      <a:pPr marL="0" indent="0">
                         <a:buNone/>
                       </a:pPr>
                       <a:r>
@@ -6196,7 +6043,7 @@
                       </a:endParaRPr>
                     </a:p>
                   </a:txBody>
-                  <a:tcPr marL="91440" marR="91440" marT="45720" marB="45720" anchor="ctr">
+                  <a:tcPr anchor="ctr">
                     <a:lnL w="12700" cap="flat" cmpd="sng" algn="ctr">
                       <a:solidFill>
                         <a:srgbClr val="D9D9D9"/>
@@ -6240,7 +6087,7 @@
                     <a:bodyPr/>
                     <a:lstStyle/>
                     <a:p>
-                      <a:pPr indent="0" marL="0">
+                      <a:pPr marL="0" indent="0">
                         <a:buNone/>
                       </a:pPr>
                       <a:r>
@@ -6261,7 +6108,7 @@
                       </a:endParaRPr>
                     </a:p>
                   </a:txBody>
-                  <a:tcPr marL="91440" marR="91440" marT="45720" marB="45720" anchor="ctr">
+                  <a:tcPr anchor="ctr">
                     <a:lnL w="12700" cap="flat" cmpd="sng" algn="ctr">
                       <a:solidFill>
                         <a:srgbClr val="D9D9D9"/>
@@ -6300,6 +6147,11 @@
                     </a:lnB>
                   </a:tcPr>
                 </a:tc>
+                <a:extLst>
+                  <a:ext uri="{0D108BD9-81ED-4DB2-BD59-A6C34878D82A}">
+                    <a16:rowId xmlns:a16="http://schemas.microsoft.com/office/drawing/2014/main" val="10002"/>
+                  </a:ext>
+                </a:extLst>
               </a:tr>
               <a:tr h="502920">
                 <a:tc>
@@ -6307,7 +6159,7 @@
                     <a:bodyPr/>
                     <a:lstStyle/>
                     <a:p>
-                      <a:pPr indent="0" marL="0">
+                      <a:pPr marL="0" indent="0">
                         <a:buNone/>
                       </a:pPr>
                       <a:r>
@@ -6328,7 +6180,7 @@
                       </a:endParaRPr>
                     </a:p>
                   </a:txBody>
-                  <a:tcPr marL="91440" marR="91440" marT="45720" marB="45720" anchor="ctr">
+                  <a:tcPr anchor="ctr">
                     <a:lnL w="12700" cap="flat" cmpd="sng" algn="ctr">
                       <a:solidFill>
                         <a:srgbClr val="D9D9D9"/>
@@ -6372,7 +6224,7 @@
                     <a:bodyPr/>
                     <a:lstStyle/>
                     <a:p>
-                      <a:pPr indent="0" marL="0">
+                      <a:pPr marL="0" indent="0">
                         <a:buNone/>
                       </a:pPr>
                       <a:r>
@@ -6393,7 +6245,7 @@
                       </a:endParaRPr>
                     </a:p>
                   </a:txBody>
-                  <a:tcPr marL="91440" marR="91440" marT="45720" marB="45720" anchor="ctr">
+                  <a:tcPr anchor="ctr">
                     <a:lnL w="12700" cap="flat" cmpd="sng" algn="ctr">
                       <a:solidFill>
                         <a:srgbClr val="D9D9D9"/>
@@ -6437,7 +6289,7 @@
                     <a:bodyPr/>
                     <a:lstStyle/>
                     <a:p>
-                      <a:pPr indent="0" marL="0">
+                      <a:pPr marL="0" indent="0">
                         <a:buNone/>
                       </a:pPr>
                       <a:r>
@@ -6458,7 +6310,7 @@
                       </a:endParaRPr>
                     </a:p>
                   </a:txBody>
-                  <a:tcPr marL="91440" marR="91440" marT="45720" marB="45720" anchor="ctr">
+                  <a:tcPr anchor="ctr">
                     <a:lnL w="12700" cap="flat" cmpd="sng" algn="ctr">
                       <a:solidFill>
                         <a:srgbClr val="D9D9D9"/>
@@ -6502,7 +6354,7 @@
                     <a:bodyPr/>
                     <a:lstStyle/>
                     <a:p>
-                      <a:pPr indent="0" marL="0">
+                      <a:pPr marL="0" indent="0">
                         <a:buNone/>
                       </a:pPr>
                       <a:r>
@@ -6523,7 +6375,7 @@
                       </a:endParaRPr>
                     </a:p>
                   </a:txBody>
-                  <a:tcPr marL="91440" marR="91440" marT="45720" marB="45720" anchor="ctr">
+                  <a:tcPr anchor="ctr">
                     <a:lnL w="12700" cap="flat" cmpd="sng" algn="ctr">
                       <a:solidFill>
                         <a:srgbClr val="D9D9D9"/>
@@ -6562,6 +6414,11 @@
                     </a:lnB>
                   </a:tcPr>
                 </a:tc>
+                <a:extLst>
+                  <a:ext uri="{0D108BD9-81ED-4DB2-BD59-A6C34878D82A}">
+                    <a16:rowId xmlns:a16="http://schemas.microsoft.com/office/drawing/2014/main" val="10003"/>
+                  </a:ext>
+                </a:extLst>
               </a:tr>
             </a:tbl>
           </a:graphicData>
@@ -6583,6 +6440,7 @@
         <a:solidFill>
           <a:srgbClr val="FFFFFF"/>
         </a:solidFill>
+        <a:effectLst/>
       </p:bgPr>
     </p:bg>
     <p:spTree>
@@ -6620,7 +6478,7 @@
           <a:bodyPr wrap="square" lIns="0" tIns="0" rIns="0" bIns="0" rtlCol="0" anchor="ctr"/>
           <a:lstStyle/>
           <a:p>
-            <a:pPr indent="0" marL="0">
+            <a:pPr marL="0" indent="0">
               <a:buNone/>
             </a:pPr>
             <a:r>
@@ -6778,10 +6636,10 @@
   <a:themeElements>
     <a:clrScheme name="Office">
       <a:dk1>
-        <a:sysClr val="windowText" lastClr="000000"/>
+        <a:sysClr val="windowText" lastClr="C6C6C6"/>
       </a:dk1>
       <a:lt1>
-        <a:sysClr val="window" lastClr="FFFFFF"/>
+        <a:sysClr val="window" lastClr="000000"/>
       </a:lt1>
       <a:dk2>
         <a:srgbClr val="44546A"/>
@@ -7066,4 +6924,319 @@
     </a:ext>
   </a:extLst>
 </a:theme>
+</file>
+
+<file path=ppt/theme/theme2.xml><?xml version="1.0" encoding="utf-8"?>
+<a:theme xmlns:a="http://schemas.openxmlformats.org/drawingml/2006/main" name="Office Theme">
+  <a:themeElements>
+    <a:clrScheme name="Office">
+      <a:dk1>
+        <a:sysClr val="windowText" lastClr="C6C6C6"/>
+      </a:dk1>
+      <a:lt1>
+        <a:sysClr val="window" lastClr="000000"/>
+      </a:lt1>
+      <a:dk2>
+        <a:srgbClr val="0E2841"/>
+      </a:dk2>
+      <a:lt2>
+        <a:srgbClr val="E8E8E8"/>
+      </a:lt2>
+      <a:accent1>
+        <a:srgbClr val="156082"/>
+      </a:accent1>
+      <a:accent2>
+        <a:srgbClr val="E97132"/>
+      </a:accent2>
+      <a:accent3>
+        <a:srgbClr val="196B24"/>
+      </a:accent3>
+      <a:accent4>
+        <a:srgbClr val="0F9ED5"/>
+      </a:accent4>
+      <a:accent5>
+        <a:srgbClr val="A02B93"/>
+      </a:accent5>
+      <a:accent6>
+        <a:srgbClr val="4EA72E"/>
+      </a:accent6>
+      <a:hlink>
+        <a:srgbClr val="467886"/>
+      </a:hlink>
+      <a:folHlink>
+        <a:srgbClr val="96607D"/>
+      </a:folHlink>
+    </a:clrScheme>
+    <a:fontScheme name="Office">
+      <a:majorFont>
+        <a:latin typeface="Aptos Display" panose="02110004020202020204"/>
+        <a:ea typeface=""/>
+        <a:cs typeface=""/>
+        <a:font script="Jpan" typeface="游ゴシック Light"/>
+        <a:font script="Hang" typeface="맑은 고딕"/>
+        <a:font script="Hans" typeface="等线 Light"/>
+        <a:font script="Hant" typeface="新細明體"/>
+        <a:font script="Arab" typeface="Times New Roman"/>
+        <a:font script="Hebr" typeface="Times New Roman"/>
+        <a:font script="Thai" typeface="Angsana New"/>
+        <a:font script="Ethi" typeface="Nyala"/>
+        <a:font script="Beng" typeface="Vrinda"/>
+        <a:font script="Gujr" typeface="Shruti"/>
+        <a:font script="Khmr" typeface="MoolBoran"/>
+        <a:font script="Knda" typeface="Tunga"/>
+        <a:font script="Guru" typeface="Raavi"/>
+        <a:font script="Cans" typeface="Euphemia"/>
+        <a:font script="Cher" typeface="Plantagenet Cherokee"/>
+        <a:font script="Yiii" typeface="Microsoft Yi Baiti"/>
+        <a:font script="Tibt" typeface="Microsoft Himalaya"/>
+        <a:font script="Thaa" typeface="MV Boli"/>
+        <a:font script="Deva" typeface="Mangal"/>
+        <a:font script="Telu" typeface="Gautami"/>
+        <a:font script="Taml" typeface="Latha"/>
+        <a:font script="Syrc" typeface="Estrangelo Edessa"/>
+        <a:font script="Orya" typeface="Kalinga"/>
+        <a:font script="Mlym" typeface="Kartika"/>
+        <a:font script="Laoo" typeface="DokChampa"/>
+        <a:font script="Sinh" typeface="Iskoola Pota"/>
+        <a:font script="Mong" typeface="Mongolian Baiti"/>
+        <a:font script="Viet" typeface="Times New Roman"/>
+        <a:font script="Uigh" typeface="Microsoft Uighur"/>
+        <a:font script="Geor" typeface="Sylfaen"/>
+        <a:font script="Armn" typeface="Arial"/>
+        <a:font script="Bugi" typeface="Leelawadee UI"/>
+        <a:font script="Bopo" typeface="Microsoft JhengHei"/>
+        <a:font script="Java" typeface="Javanese Text"/>
+        <a:font script="Lisu" typeface="Segoe UI"/>
+        <a:font script="Mymr" typeface="Myanmar Text"/>
+        <a:font script="Nkoo" typeface="Ebrima"/>
+        <a:font script="Olck" typeface="Nirmala UI"/>
+        <a:font script="Osma" typeface="Ebrima"/>
+        <a:font script="Phag" typeface="Phagspa"/>
+        <a:font script="Syrn" typeface="Estrangelo Edessa"/>
+        <a:font script="Syrj" typeface="Estrangelo Edessa"/>
+        <a:font script="Syre" typeface="Estrangelo Edessa"/>
+        <a:font script="Sora" typeface="Nirmala UI"/>
+        <a:font script="Tale" typeface="Microsoft Tai Le"/>
+        <a:font script="Talu" typeface="Microsoft New Tai Lue"/>
+        <a:font script="Tfng" typeface="Ebrima"/>
+      </a:majorFont>
+      <a:minorFont>
+        <a:latin typeface="Aptos" panose="02110004020202020204"/>
+        <a:ea typeface=""/>
+        <a:cs typeface=""/>
+        <a:font script="Jpan" typeface="游ゴシック"/>
+        <a:font script="Hang" typeface="맑은 고딕"/>
+        <a:font script="Hans" typeface="等线"/>
+        <a:font script="Hant" typeface="新細明體"/>
+        <a:font script="Arab" typeface="Arial"/>
+        <a:font script="Hebr" typeface="Arial"/>
+        <a:font script="Thai" typeface="Cordia New"/>
+        <a:font script="Ethi" typeface="Nyala"/>
+        <a:font script="Beng" typeface="Vrinda"/>
+        <a:font script="Gujr" typeface="Shruti"/>
+        <a:font script="Khmr" typeface="DaunPenh"/>
+        <a:font script="Knda" typeface="Tunga"/>
+        <a:font script="Guru" typeface="Raavi"/>
+        <a:font script="Cans" typeface="Euphemia"/>
+        <a:font script="Cher" typeface="Plantagenet Cherokee"/>
+        <a:font script="Yiii" typeface="Microsoft Yi Baiti"/>
+        <a:font script="Tibt" typeface="Microsoft Himalaya"/>
+        <a:font script="Thaa" typeface="MV Boli"/>
+        <a:font script="Deva" typeface="Mangal"/>
+        <a:font script="Telu" typeface="Gautami"/>
+        <a:font script="Taml" typeface="Latha"/>
+        <a:font script="Syrc" typeface="Estrangelo Edessa"/>
+        <a:font script="Orya" typeface="Kalinga"/>
+        <a:font script="Mlym" typeface="Kartika"/>
+        <a:font script="Laoo" typeface="DokChampa"/>
+        <a:font script="Sinh" typeface="Iskoola Pota"/>
+        <a:font script="Mong" typeface="Mongolian Baiti"/>
+        <a:font script="Viet" typeface="Arial"/>
+        <a:font script="Uigh" typeface="Microsoft Uighur"/>
+        <a:font script="Geor" typeface="Sylfaen"/>
+        <a:font script="Armn" typeface="Arial"/>
+        <a:font script="Bugi" typeface="Leelawadee UI"/>
+        <a:font script="Bopo" typeface="Microsoft JhengHei"/>
+        <a:font script="Java" typeface="Javanese Text"/>
+        <a:font script="Lisu" typeface="Segoe UI"/>
+        <a:font script="Mymr" typeface="Myanmar Text"/>
+        <a:font script="Nkoo" typeface="Ebrima"/>
+        <a:font script="Olck" typeface="Nirmala UI"/>
+        <a:font script="Osma" typeface="Ebrima"/>
+        <a:font script="Phag" typeface="Phagspa"/>
+        <a:font script="Syrn" typeface="Estrangelo Edessa"/>
+        <a:font script="Syrj" typeface="Estrangelo Edessa"/>
+        <a:font script="Syre" typeface="Estrangelo Edessa"/>
+        <a:font script="Sora" typeface="Nirmala UI"/>
+        <a:font script="Tale" typeface="Microsoft Tai Le"/>
+        <a:font script="Talu" typeface="Microsoft New Tai Lue"/>
+        <a:font script="Tfng" typeface="Ebrima"/>
+      </a:minorFont>
+    </a:fontScheme>
+    <a:fmtScheme name="Office">
+      <a:fillStyleLst>
+        <a:solidFill>
+          <a:schemeClr val="phClr"/>
+        </a:solidFill>
+        <a:gradFill rotWithShape="1">
+          <a:gsLst>
+            <a:gs pos="0">
+              <a:schemeClr val="phClr">
+                <a:lumMod val="110000"/>
+                <a:satMod val="105000"/>
+                <a:tint val="67000"/>
+              </a:schemeClr>
+            </a:gs>
+            <a:gs pos="50000">
+              <a:schemeClr val="phClr">
+                <a:lumMod val="105000"/>
+                <a:satMod val="103000"/>
+                <a:tint val="73000"/>
+              </a:schemeClr>
+            </a:gs>
+            <a:gs pos="100000">
+              <a:schemeClr val="phClr">
+                <a:lumMod val="105000"/>
+                <a:satMod val="109000"/>
+                <a:tint val="81000"/>
+              </a:schemeClr>
+            </a:gs>
+          </a:gsLst>
+          <a:lin ang="5400000" scaled="0"/>
+        </a:gradFill>
+        <a:gradFill rotWithShape="1">
+          <a:gsLst>
+            <a:gs pos="0">
+              <a:schemeClr val="phClr">
+                <a:satMod val="103000"/>
+                <a:lumMod val="102000"/>
+                <a:tint val="94000"/>
+              </a:schemeClr>
+            </a:gs>
+            <a:gs pos="50000">
+              <a:schemeClr val="phClr">
+                <a:satMod val="110000"/>
+                <a:lumMod val="100000"/>
+                <a:shade val="100000"/>
+              </a:schemeClr>
+            </a:gs>
+            <a:gs pos="100000">
+              <a:schemeClr val="phClr">
+                <a:lumMod val="99000"/>
+                <a:satMod val="120000"/>
+                <a:shade val="78000"/>
+              </a:schemeClr>
+            </a:gs>
+          </a:gsLst>
+          <a:lin ang="5400000" scaled="0"/>
+        </a:gradFill>
+      </a:fillStyleLst>
+      <a:lnStyleLst>
+        <a:ln w="12700" cap="flat" cmpd="sng" algn="ctr">
+          <a:solidFill>
+            <a:schemeClr val="phClr"/>
+          </a:solidFill>
+          <a:prstDash val="solid"/>
+          <a:miter lim="800000"/>
+        </a:ln>
+        <a:ln w="19050" cap="flat" cmpd="sng" algn="ctr">
+          <a:solidFill>
+            <a:schemeClr val="phClr"/>
+          </a:solidFill>
+          <a:prstDash val="solid"/>
+          <a:miter lim="800000"/>
+        </a:ln>
+        <a:ln w="25400" cap="flat" cmpd="sng" algn="ctr">
+          <a:solidFill>
+            <a:schemeClr val="phClr"/>
+          </a:solidFill>
+          <a:prstDash val="solid"/>
+          <a:miter lim="800000"/>
+        </a:ln>
+      </a:lnStyleLst>
+      <a:effectStyleLst>
+        <a:effectStyle>
+          <a:effectLst/>
+        </a:effectStyle>
+        <a:effectStyle>
+          <a:effectLst/>
+        </a:effectStyle>
+        <a:effectStyle>
+          <a:effectLst>
+            <a:outerShdw blurRad="57150" dist="19050" dir="5400000" algn="ctr" rotWithShape="0">
+              <a:srgbClr val="000000">
+                <a:alpha val="63000"/>
+              </a:srgbClr>
+            </a:outerShdw>
+          </a:effectLst>
+        </a:effectStyle>
+      </a:effectStyleLst>
+      <a:bgFillStyleLst>
+        <a:solidFill>
+          <a:schemeClr val="phClr"/>
+        </a:solidFill>
+        <a:solidFill>
+          <a:schemeClr val="phClr">
+            <a:tint val="95000"/>
+            <a:satMod val="170000"/>
+          </a:schemeClr>
+        </a:solidFill>
+        <a:gradFill rotWithShape="1">
+          <a:gsLst>
+            <a:gs pos="0">
+              <a:schemeClr val="phClr">
+                <a:tint val="93000"/>
+                <a:satMod val="150000"/>
+                <a:shade val="98000"/>
+                <a:lumMod val="102000"/>
+              </a:schemeClr>
+            </a:gs>
+            <a:gs pos="50000">
+              <a:schemeClr val="phClr">
+                <a:tint val="98000"/>
+                <a:satMod val="130000"/>
+                <a:shade val="90000"/>
+                <a:lumMod val="103000"/>
+              </a:schemeClr>
+            </a:gs>
+            <a:gs pos="100000">
+              <a:schemeClr val="phClr">
+                <a:shade val="63000"/>
+                <a:satMod val="120000"/>
+              </a:schemeClr>
+            </a:gs>
+          </a:gsLst>
+          <a:lin ang="5400000" scaled="0"/>
+        </a:gradFill>
+      </a:bgFillStyleLst>
+    </a:fmtScheme>
+  </a:themeElements>
+  <a:objectDefaults>
+    <a:lnDef>
+      <a:spPr/>
+      <a:bodyPr/>
+      <a:lstStyle/>
+      <a:style>
+        <a:lnRef idx="2">
+          <a:schemeClr val="accent1"/>
+        </a:lnRef>
+        <a:fillRef idx="0">
+          <a:schemeClr val="accent1"/>
+        </a:fillRef>
+        <a:effectRef idx="1">
+          <a:schemeClr val="accent1"/>
+        </a:effectRef>
+        <a:fontRef idx="minor">
+          <a:schemeClr val="tx1"/>
+        </a:fontRef>
+      </a:style>
+    </a:lnDef>
+  </a:objectDefaults>
+  <a:extraClrSchemeLst/>
+  <a:extLst>
+    <a:ext uri="{05A4C25C-085E-4340-85A3-A5531E510DB2}">
+      <thm15:themeFamily xmlns:thm15="http://schemas.microsoft.com/office/thememl/2012/main" name="Office Theme" id="{2E142A2C-CD16-42D6-873A-C26D2A0506FA}" vid="{1BDDFF52-6CD6-40A5-AB3C-68EB2F1E4D0A}"/>
+    </a:ext>
+  </a:extLst>
+</a:theme>
 </file>